--- a/盡情的敬拜.pptx
+++ b/盡情的敬拜.pptx
@@ -5,11 +5,15 @@
     <p:sldMasterId id="2147483672" r:id="rId1"/>
   </p:sldMasterIdLst>
   <p:sldIdLst>
-    <p:sldId id="256" r:id="rId2"/>
-    <p:sldId id="257" r:id="rId3"/>
-    <p:sldId id="258" r:id="rId4"/>
+    <p:sldId id="614" r:id="rId2"/>
+    <p:sldId id="615" r:id="rId3"/>
+    <p:sldId id="616" r:id="rId4"/>
+    <p:sldId id="617" r:id="rId5"/>
+    <p:sldId id="618" r:id="rId6"/>
+    <p:sldId id="619" r:id="rId7"/>
+    <p:sldId id="620" r:id="rId8"/>
   </p:sldIdLst>
-  <p:sldSz cx="9144000" cy="6858000" type="screen4x3"/>
+  <p:sldSz cx="12192000" cy="6858000"/>
   <p:notesSz cx="6858000" cy="9144000"/>
   <p:defaultTextStyle>
     <a:defPPr>
@@ -106,6 +110,22 @@
       </a:defRPr>
     </a:lvl9pPr>
   </p:defaultTextStyle>
+  <p:extLst>
+    <p:ext uri="{EFAFB233-063F-42B5-8137-9DF3F51BA10A}">
+      <p15:sldGuideLst xmlns:p15="http://schemas.microsoft.com/office/powerpoint/2012/main">
+        <p15:guide id="1" orient="horz" pos="2160" userDrawn="1">
+          <p15:clr>
+            <a:srgbClr val="A4A3A4"/>
+          </p15:clr>
+        </p15:guide>
+        <p15:guide id="2" pos="3840" userDrawn="1">
+          <p15:clr>
+            <a:srgbClr val="A4A3A4"/>
+          </p15:clr>
+        </p15:guide>
+      </p15:sldGuideLst>
+    </p:ext>
+  </p:extLst>
 </p:presentation>
 </file>
 
@@ -138,8 +158,8 @@
         </p:nvSpPr>
         <p:spPr>
           <a:xfrm>
-            <a:off x="685800" y="2130425"/>
-            <a:ext cx="7772400" cy="1470025"/>
+            <a:off x="914400" y="2130426"/>
+            <a:ext cx="10363200" cy="1470025"/>
           </a:xfrm>
         </p:spPr>
         <p:txBody>
@@ -147,10 +167,9 @@
           <a:lstStyle/>
           <a:p>
             <a:r>
-              <a:rPr lang="zh-TW" altLang="en-US" smtClean="0"/>
+              <a:rPr lang="zh-TW" altLang="en-US"/>
               <a:t>按一下以編輯母片標題樣式</a:t>
             </a:r>
-            <a:endParaRPr lang="zh-TW" altLang="en-US"/>
           </a:p>
         </p:txBody>
       </p:sp>
@@ -166,8 +185,8 @@
         </p:nvSpPr>
         <p:spPr>
           <a:xfrm>
-            <a:off x="1371600" y="3886200"/>
-            <a:ext cx="6400800" cy="1752600"/>
+            <a:off x="1828800" y="3886200"/>
+            <a:ext cx="8534400" cy="1752600"/>
           </a:xfrm>
         </p:spPr>
         <p:txBody>
@@ -266,10 +285,9 @@
           </a:lstStyle>
           <a:p>
             <a:r>
-              <a:rPr lang="zh-TW" altLang="en-US" smtClean="0"/>
+              <a:rPr lang="zh-TW" altLang="en-US"/>
               <a:t>按一下以編輯母片副標題樣式</a:t>
             </a:r>
-            <a:endParaRPr lang="zh-TW" altLang="en-US"/>
           </a:p>
         </p:txBody>
       </p:sp>
@@ -291,7 +309,7 @@
             <a:fld id="{D63DAF70-B339-47C6-97E2-A0E7000C2544}" type="datetimeFigureOut">
               <a:rPr lang="zh-TW" altLang="en-US" smtClean="0"/>
               <a:pPr/>
-              <a:t>2017/10/7</a:t>
+              <a:t>2024/4/13</a:t>
             </a:fld>
             <a:endParaRPr lang="zh-TW" altLang="en-US"/>
           </a:p>
@@ -381,10 +399,9 @@
           <a:lstStyle/>
           <a:p>
             <a:r>
-              <a:rPr lang="zh-TW" altLang="en-US" smtClean="0"/>
+              <a:rPr lang="zh-TW" altLang="en-US"/>
               <a:t>按一下以編輯母片標題樣式</a:t>
             </a:r>
-            <a:endParaRPr lang="zh-TW" altLang="en-US"/>
           </a:p>
         </p:txBody>
       </p:sp>
@@ -405,38 +422,37 @@
           <a:p>
             <a:pPr lvl="0"/>
             <a:r>
-              <a:rPr lang="zh-TW" altLang="en-US" smtClean="0"/>
+              <a:rPr lang="zh-TW" altLang="en-US"/>
               <a:t>按一下以編輯母片文字樣式</a:t>
             </a:r>
           </a:p>
           <a:p>
             <a:pPr lvl="1"/>
             <a:r>
-              <a:rPr lang="zh-TW" altLang="en-US" smtClean="0"/>
+              <a:rPr lang="zh-TW" altLang="en-US"/>
               <a:t>第二層</a:t>
             </a:r>
           </a:p>
           <a:p>
             <a:pPr lvl="2"/>
             <a:r>
-              <a:rPr lang="zh-TW" altLang="en-US" smtClean="0"/>
+              <a:rPr lang="zh-TW" altLang="en-US"/>
               <a:t>第三層</a:t>
             </a:r>
           </a:p>
           <a:p>
             <a:pPr lvl="3"/>
             <a:r>
-              <a:rPr lang="zh-TW" altLang="en-US" smtClean="0"/>
+              <a:rPr lang="zh-TW" altLang="en-US"/>
               <a:t>第四層</a:t>
             </a:r>
           </a:p>
           <a:p>
             <a:pPr lvl="4"/>
             <a:r>
-              <a:rPr lang="zh-TW" altLang="en-US" smtClean="0"/>
+              <a:rPr lang="zh-TW" altLang="en-US"/>
               <a:t>第五層</a:t>
             </a:r>
-            <a:endParaRPr lang="zh-TW" altLang="en-US"/>
           </a:p>
         </p:txBody>
       </p:sp>
@@ -458,7 +474,7 @@
             <a:fld id="{D63DAF70-B339-47C6-97E2-A0E7000C2544}" type="datetimeFigureOut">
               <a:rPr lang="zh-TW" altLang="en-US" smtClean="0"/>
               <a:pPr/>
-              <a:t>2017/10/7</a:t>
+              <a:t>2024/4/13</a:t>
             </a:fld>
             <a:endParaRPr lang="zh-TW" altLang="en-US"/>
           </a:p>
@@ -544,8 +560,8 @@
         </p:nvSpPr>
         <p:spPr>
           <a:xfrm>
-            <a:off x="6629400" y="274638"/>
-            <a:ext cx="2057400" cy="5851525"/>
+            <a:off x="8839200" y="274639"/>
+            <a:ext cx="2743200" cy="5851525"/>
           </a:xfrm>
         </p:spPr>
         <p:txBody>
@@ -553,10 +569,9 @@
           <a:lstStyle/>
           <a:p>
             <a:r>
-              <a:rPr lang="zh-TW" altLang="en-US" smtClean="0"/>
+              <a:rPr lang="zh-TW" altLang="en-US"/>
               <a:t>按一下以編輯母片標題樣式</a:t>
             </a:r>
-            <a:endParaRPr lang="zh-TW" altLang="en-US"/>
           </a:p>
         </p:txBody>
       </p:sp>
@@ -572,8 +587,8 @@
         </p:nvSpPr>
         <p:spPr>
           <a:xfrm>
-            <a:off x="457200" y="274638"/>
-            <a:ext cx="6019800" cy="5851525"/>
+            <a:off x="609600" y="274639"/>
+            <a:ext cx="8026400" cy="5851525"/>
           </a:xfrm>
         </p:spPr>
         <p:txBody>
@@ -582,38 +597,37 @@
           <a:p>
             <a:pPr lvl="0"/>
             <a:r>
-              <a:rPr lang="zh-TW" altLang="en-US" smtClean="0"/>
+              <a:rPr lang="zh-TW" altLang="en-US"/>
               <a:t>按一下以編輯母片文字樣式</a:t>
             </a:r>
           </a:p>
           <a:p>
             <a:pPr lvl="1"/>
             <a:r>
-              <a:rPr lang="zh-TW" altLang="en-US" smtClean="0"/>
+              <a:rPr lang="zh-TW" altLang="en-US"/>
               <a:t>第二層</a:t>
             </a:r>
           </a:p>
           <a:p>
             <a:pPr lvl="2"/>
             <a:r>
-              <a:rPr lang="zh-TW" altLang="en-US" smtClean="0"/>
+              <a:rPr lang="zh-TW" altLang="en-US"/>
               <a:t>第三層</a:t>
             </a:r>
           </a:p>
           <a:p>
             <a:pPr lvl="3"/>
             <a:r>
-              <a:rPr lang="zh-TW" altLang="en-US" smtClean="0"/>
+              <a:rPr lang="zh-TW" altLang="en-US"/>
               <a:t>第四層</a:t>
             </a:r>
           </a:p>
           <a:p>
             <a:pPr lvl="4"/>
             <a:r>
-              <a:rPr lang="zh-TW" altLang="en-US" smtClean="0"/>
+              <a:rPr lang="zh-TW" altLang="en-US"/>
               <a:t>第五層</a:t>
             </a:r>
-            <a:endParaRPr lang="zh-TW" altLang="en-US"/>
           </a:p>
         </p:txBody>
       </p:sp>
@@ -635,7 +649,7 @@
             <a:fld id="{D63DAF70-B339-47C6-97E2-A0E7000C2544}" type="datetimeFigureOut">
               <a:rPr lang="zh-TW" altLang="en-US" smtClean="0"/>
               <a:pPr/>
-              <a:t>2017/10/7</a:t>
+              <a:t>2024/4/13</a:t>
             </a:fld>
             <a:endParaRPr lang="zh-TW" altLang="en-US"/>
           </a:p>
@@ -725,10 +739,9 @@
           <a:lstStyle/>
           <a:p>
             <a:r>
-              <a:rPr lang="zh-TW" altLang="en-US" smtClean="0"/>
+              <a:rPr lang="zh-TW" altLang="en-US"/>
               <a:t>按一下以編輯母片標題樣式</a:t>
             </a:r>
-            <a:endParaRPr lang="zh-TW" altLang="en-US"/>
           </a:p>
         </p:txBody>
       </p:sp>
@@ -749,38 +762,37 @@
           <a:p>
             <a:pPr lvl="0"/>
             <a:r>
-              <a:rPr lang="zh-TW" altLang="en-US" smtClean="0"/>
+              <a:rPr lang="zh-TW" altLang="en-US"/>
               <a:t>按一下以編輯母片文字樣式</a:t>
             </a:r>
           </a:p>
           <a:p>
             <a:pPr lvl="1"/>
             <a:r>
-              <a:rPr lang="zh-TW" altLang="en-US" smtClean="0"/>
+              <a:rPr lang="zh-TW" altLang="en-US"/>
               <a:t>第二層</a:t>
             </a:r>
           </a:p>
           <a:p>
             <a:pPr lvl="2"/>
             <a:r>
-              <a:rPr lang="zh-TW" altLang="en-US" smtClean="0"/>
+              <a:rPr lang="zh-TW" altLang="en-US"/>
               <a:t>第三層</a:t>
             </a:r>
           </a:p>
           <a:p>
             <a:pPr lvl="3"/>
             <a:r>
-              <a:rPr lang="zh-TW" altLang="en-US" smtClean="0"/>
+              <a:rPr lang="zh-TW" altLang="en-US"/>
               <a:t>第四層</a:t>
             </a:r>
           </a:p>
           <a:p>
             <a:pPr lvl="4"/>
             <a:r>
-              <a:rPr lang="zh-TW" altLang="en-US" smtClean="0"/>
+              <a:rPr lang="zh-TW" altLang="en-US"/>
               <a:t>第五層</a:t>
             </a:r>
-            <a:endParaRPr lang="zh-TW" altLang="en-US"/>
           </a:p>
         </p:txBody>
       </p:sp>
@@ -802,7 +814,7 @@
             <a:fld id="{D63DAF70-B339-47C6-97E2-A0E7000C2544}" type="datetimeFigureOut">
               <a:rPr lang="zh-TW" altLang="en-US" smtClean="0"/>
               <a:pPr/>
-              <a:t>2017/10/7</a:t>
+              <a:t>2024/4/13</a:t>
             </a:fld>
             <a:endParaRPr lang="zh-TW" altLang="en-US"/>
           </a:p>
@@ -888,8 +900,8 @@
         </p:nvSpPr>
         <p:spPr>
           <a:xfrm>
-            <a:off x="722313" y="4406900"/>
-            <a:ext cx="7772400" cy="1362075"/>
+            <a:off x="963084" y="4406901"/>
+            <a:ext cx="10363200" cy="1362075"/>
           </a:xfrm>
         </p:spPr>
         <p:txBody>
@@ -901,10 +913,9 @@
           </a:lstStyle>
           <a:p>
             <a:r>
-              <a:rPr lang="zh-TW" altLang="en-US" smtClean="0"/>
+              <a:rPr lang="zh-TW" altLang="en-US"/>
               <a:t>按一下以編輯母片標題樣式</a:t>
             </a:r>
-            <a:endParaRPr lang="zh-TW" altLang="en-US"/>
           </a:p>
         </p:txBody>
       </p:sp>
@@ -920,8 +931,8 @@
         </p:nvSpPr>
         <p:spPr>
           <a:xfrm>
-            <a:off x="722313" y="2906713"/>
-            <a:ext cx="7772400" cy="1500187"/>
+            <a:off x="963084" y="2906713"/>
+            <a:ext cx="10363200" cy="1500187"/>
           </a:xfrm>
         </p:spPr>
         <p:txBody>
@@ -1021,7 +1032,7 @@
           <a:p>
             <a:pPr lvl="0"/>
             <a:r>
-              <a:rPr lang="zh-TW" altLang="en-US" smtClean="0"/>
+              <a:rPr lang="zh-TW" altLang="en-US"/>
               <a:t>按一下以編輯母片文字樣式</a:t>
             </a:r>
           </a:p>
@@ -1045,7 +1056,7 @@
             <a:fld id="{D63DAF70-B339-47C6-97E2-A0E7000C2544}" type="datetimeFigureOut">
               <a:rPr lang="zh-TW" altLang="en-US" smtClean="0"/>
               <a:pPr/>
-              <a:t>2017/10/7</a:t>
+              <a:t>2024/4/13</a:t>
             </a:fld>
             <a:endParaRPr lang="zh-TW" altLang="en-US"/>
           </a:p>
@@ -1135,10 +1146,9 @@
           <a:lstStyle/>
           <a:p>
             <a:r>
-              <a:rPr lang="zh-TW" altLang="en-US" smtClean="0"/>
+              <a:rPr lang="zh-TW" altLang="en-US"/>
               <a:t>按一下以編輯母片標題樣式</a:t>
             </a:r>
-            <a:endParaRPr lang="zh-TW" altLang="en-US"/>
           </a:p>
         </p:txBody>
       </p:sp>
@@ -1154,8 +1164,8 @@
         </p:nvSpPr>
         <p:spPr>
           <a:xfrm>
-            <a:off x="457200" y="1600200"/>
-            <a:ext cx="4038600" cy="4525963"/>
+            <a:off x="609600" y="1600201"/>
+            <a:ext cx="5384800" cy="4525963"/>
           </a:xfrm>
         </p:spPr>
         <p:txBody>
@@ -1192,38 +1202,37 @@
           <a:p>
             <a:pPr lvl="0"/>
             <a:r>
-              <a:rPr lang="zh-TW" altLang="en-US" smtClean="0"/>
+              <a:rPr lang="zh-TW" altLang="en-US"/>
               <a:t>按一下以編輯母片文字樣式</a:t>
             </a:r>
           </a:p>
           <a:p>
             <a:pPr lvl="1"/>
             <a:r>
-              <a:rPr lang="zh-TW" altLang="en-US" smtClean="0"/>
+              <a:rPr lang="zh-TW" altLang="en-US"/>
               <a:t>第二層</a:t>
             </a:r>
           </a:p>
           <a:p>
             <a:pPr lvl="2"/>
             <a:r>
-              <a:rPr lang="zh-TW" altLang="en-US" smtClean="0"/>
+              <a:rPr lang="zh-TW" altLang="en-US"/>
               <a:t>第三層</a:t>
             </a:r>
           </a:p>
           <a:p>
             <a:pPr lvl="3"/>
             <a:r>
-              <a:rPr lang="zh-TW" altLang="en-US" smtClean="0"/>
+              <a:rPr lang="zh-TW" altLang="en-US"/>
               <a:t>第四層</a:t>
             </a:r>
           </a:p>
           <a:p>
             <a:pPr lvl="4"/>
             <a:r>
-              <a:rPr lang="zh-TW" altLang="en-US" smtClean="0"/>
+              <a:rPr lang="zh-TW" altLang="en-US"/>
               <a:t>第五層</a:t>
             </a:r>
-            <a:endParaRPr lang="zh-TW" altLang="en-US"/>
           </a:p>
         </p:txBody>
       </p:sp>
@@ -1239,8 +1248,8 @@
         </p:nvSpPr>
         <p:spPr>
           <a:xfrm>
-            <a:off x="4648200" y="1600200"/>
-            <a:ext cx="4038600" cy="4525963"/>
+            <a:off x="6197600" y="1600201"/>
+            <a:ext cx="5384800" cy="4525963"/>
           </a:xfrm>
         </p:spPr>
         <p:txBody>
@@ -1277,38 +1286,37 @@
           <a:p>
             <a:pPr lvl="0"/>
             <a:r>
-              <a:rPr lang="zh-TW" altLang="en-US" smtClean="0"/>
+              <a:rPr lang="zh-TW" altLang="en-US"/>
               <a:t>按一下以編輯母片文字樣式</a:t>
             </a:r>
           </a:p>
           <a:p>
             <a:pPr lvl="1"/>
             <a:r>
-              <a:rPr lang="zh-TW" altLang="en-US" smtClean="0"/>
+              <a:rPr lang="zh-TW" altLang="en-US"/>
               <a:t>第二層</a:t>
             </a:r>
           </a:p>
           <a:p>
             <a:pPr lvl="2"/>
             <a:r>
-              <a:rPr lang="zh-TW" altLang="en-US" smtClean="0"/>
+              <a:rPr lang="zh-TW" altLang="en-US"/>
               <a:t>第三層</a:t>
             </a:r>
           </a:p>
           <a:p>
             <a:pPr lvl="3"/>
             <a:r>
-              <a:rPr lang="zh-TW" altLang="en-US" smtClean="0"/>
+              <a:rPr lang="zh-TW" altLang="en-US"/>
               <a:t>第四層</a:t>
             </a:r>
           </a:p>
           <a:p>
             <a:pPr lvl="4"/>
             <a:r>
-              <a:rPr lang="zh-TW" altLang="en-US" smtClean="0"/>
+              <a:rPr lang="zh-TW" altLang="en-US"/>
               <a:t>第五層</a:t>
             </a:r>
-            <a:endParaRPr lang="zh-TW" altLang="en-US"/>
           </a:p>
         </p:txBody>
       </p:sp>
@@ -1330,7 +1338,7 @@
             <a:fld id="{D63DAF70-B339-47C6-97E2-A0E7000C2544}" type="datetimeFigureOut">
               <a:rPr lang="zh-TW" altLang="en-US" smtClean="0"/>
               <a:pPr/>
-              <a:t>2017/10/7</a:t>
+              <a:t>2024/4/13</a:t>
             </a:fld>
             <a:endParaRPr lang="zh-TW" altLang="en-US"/>
           </a:p>
@@ -1424,10 +1432,9 @@
           </a:lstStyle>
           <a:p>
             <a:r>
-              <a:rPr lang="zh-TW" altLang="en-US" smtClean="0"/>
+              <a:rPr lang="zh-TW" altLang="en-US"/>
               <a:t>按一下以編輯母片標題樣式</a:t>
             </a:r>
-            <a:endParaRPr lang="zh-TW" altLang="en-US"/>
           </a:p>
         </p:txBody>
       </p:sp>
@@ -1443,8 +1450,8 @@
         </p:nvSpPr>
         <p:spPr>
           <a:xfrm>
-            <a:off x="457200" y="1535113"/>
-            <a:ext cx="4040188" cy="639762"/>
+            <a:off x="609600" y="1535113"/>
+            <a:ext cx="5386917" cy="639762"/>
           </a:xfrm>
         </p:spPr>
         <p:txBody>
@@ -1490,7 +1497,7 @@
           <a:p>
             <a:pPr lvl="0"/>
             <a:r>
-              <a:rPr lang="zh-TW" altLang="en-US" smtClean="0"/>
+              <a:rPr lang="zh-TW" altLang="en-US"/>
               <a:t>按一下以編輯母片文字樣式</a:t>
             </a:r>
           </a:p>
@@ -1508,8 +1515,8 @@
         </p:nvSpPr>
         <p:spPr>
           <a:xfrm>
-            <a:off x="457200" y="2174875"/>
-            <a:ext cx="4040188" cy="3951288"/>
+            <a:off x="609600" y="2174875"/>
+            <a:ext cx="5386917" cy="3951288"/>
           </a:xfrm>
         </p:spPr>
         <p:txBody>
@@ -1546,38 +1553,37 @@
           <a:p>
             <a:pPr lvl="0"/>
             <a:r>
-              <a:rPr lang="zh-TW" altLang="en-US" smtClean="0"/>
+              <a:rPr lang="zh-TW" altLang="en-US"/>
               <a:t>按一下以編輯母片文字樣式</a:t>
             </a:r>
           </a:p>
           <a:p>
             <a:pPr lvl="1"/>
             <a:r>
-              <a:rPr lang="zh-TW" altLang="en-US" smtClean="0"/>
+              <a:rPr lang="zh-TW" altLang="en-US"/>
               <a:t>第二層</a:t>
             </a:r>
           </a:p>
           <a:p>
             <a:pPr lvl="2"/>
             <a:r>
-              <a:rPr lang="zh-TW" altLang="en-US" smtClean="0"/>
+              <a:rPr lang="zh-TW" altLang="en-US"/>
               <a:t>第三層</a:t>
             </a:r>
           </a:p>
           <a:p>
             <a:pPr lvl="3"/>
             <a:r>
-              <a:rPr lang="zh-TW" altLang="en-US" smtClean="0"/>
+              <a:rPr lang="zh-TW" altLang="en-US"/>
               <a:t>第四層</a:t>
             </a:r>
           </a:p>
           <a:p>
             <a:pPr lvl="4"/>
             <a:r>
-              <a:rPr lang="zh-TW" altLang="en-US" smtClean="0"/>
+              <a:rPr lang="zh-TW" altLang="en-US"/>
               <a:t>第五層</a:t>
             </a:r>
-            <a:endParaRPr lang="zh-TW" altLang="en-US"/>
           </a:p>
         </p:txBody>
       </p:sp>
@@ -1593,8 +1599,8 @@
         </p:nvSpPr>
         <p:spPr>
           <a:xfrm>
-            <a:off x="4645025" y="1535113"/>
-            <a:ext cx="4041775" cy="639762"/>
+            <a:off x="6193368" y="1535113"/>
+            <a:ext cx="5389033" cy="639762"/>
           </a:xfrm>
         </p:spPr>
         <p:txBody>
@@ -1640,7 +1646,7 @@
           <a:p>
             <a:pPr lvl="0"/>
             <a:r>
-              <a:rPr lang="zh-TW" altLang="en-US" smtClean="0"/>
+              <a:rPr lang="zh-TW" altLang="en-US"/>
               <a:t>按一下以編輯母片文字樣式</a:t>
             </a:r>
           </a:p>
@@ -1658,8 +1664,8 @@
         </p:nvSpPr>
         <p:spPr>
           <a:xfrm>
-            <a:off x="4645025" y="2174875"/>
-            <a:ext cx="4041775" cy="3951288"/>
+            <a:off x="6193368" y="2174875"/>
+            <a:ext cx="5389033" cy="3951288"/>
           </a:xfrm>
         </p:spPr>
         <p:txBody>
@@ -1696,38 +1702,37 @@
           <a:p>
             <a:pPr lvl="0"/>
             <a:r>
-              <a:rPr lang="zh-TW" altLang="en-US" smtClean="0"/>
+              <a:rPr lang="zh-TW" altLang="en-US"/>
               <a:t>按一下以編輯母片文字樣式</a:t>
             </a:r>
           </a:p>
           <a:p>
             <a:pPr lvl="1"/>
             <a:r>
-              <a:rPr lang="zh-TW" altLang="en-US" smtClean="0"/>
+              <a:rPr lang="zh-TW" altLang="en-US"/>
               <a:t>第二層</a:t>
             </a:r>
           </a:p>
           <a:p>
             <a:pPr lvl="2"/>
             <a:r>
-              <a:rPr lang="zh-TW" altLang="en-US" smtClean="0"/>
+              <a:rPr lang="zh-TW" altLang="en-US"/>
               <a:t>第三層</a:t>
             </a:r>
           </a:p>
           <a:p>
             <a:pPr lvl="3"/>
             <a:r>
-              <a:rPr lang="zh-TW" altLang="en-US" smtClean="0"/>
+              <a:rPr lang="zh-TW" altLang="en-US"/>
               <a:t>第四層</a:t>
             </a:r>
           </a:p>
           <a:p>
             <a:pPr lvl="4"/>
             <a:r>
-              <a:rPr lang="zh-TW" altLang="en-US" smtClean="0"/>
+              <a:rPr lang="zh-TW" altLang="en-US"/>
               <a:t>第五層</a:t>
             </a:r>
-            <a:endParaRPr lang="zh-TW" altLang="en-US"/>
           </a:p>
         </p:txBody>
       </p:sp>
@@ -1749,7 +1754,7 @@
             <a:fld id="{D63DAF70-B339-47C6-97E2-A0E7000C2544}" type="datetimeFigureOut">
               <a:rPr lang="zh-TW" altLang="en-US" smtClean="0"/>
               <a:pPr/>
-              <a:t>2017/10/7</a:t>
+              <a:t>2024/4/13</a:t>
             </a:fld>
             <a:endParaRPr lang="zh-TW" altLang="en-US"/>
           </a:p>
@@ -1839,10 +1844,9 @@
           <a:lstStyle/>
           <a:p>
             <a:r>
-              <a:rPr lang="zh-TW" altLang="en-US" smtClean="0"/>
+              <a:rPr lang="zh-TW" altLang="en-US"/>
               <a:t>按一下以編輯母片標題樣式</a:t>
             </a:r>
-            <a:endParaRPr lang="zh-TW" altLang="en-US"/>
           </a:p>
         </p:txBody>
       </p:sp>
@@ -1864,7 +1868,7 @@
             <a:fld id="{D63DAF70-B339-47C6-97E2-A0E7000C2544}" type="datetimeFigureOut">
               <a:rPr lang="zh-TW" altLang="en-US" smtClean="0"/>
               <a:pPr/>
-              <a:t>2017/10/7</a:t>
+              <a:t>2024/4/13</a:t>
             </a:fld>
             <a:endParaRPr lang="zh-TW" altLang="en-US"/>
           </a:p>
@@ -1956,7 +1960,7 @@
             <a:fld id="{D63DAF70-B339-47C6-97E2-A0E7000C2544}" type="datetimeFigureOut">
               <a:rPr lang="zh-TW" altLang="en-US" smtClean="0"/>
               <a:pPr/>
-              <a:t>2017/10/7</a:t>
+              <a:t>2024/4/13</a:t>
             </a:fld>
             <a:endParaRPr lang="zh-TW" altLang="en-US"/>
           </a:p>
@@ -2042,8 +2046,8 @@
         </p:nvSpPr>
         <p:spPr>
           <a:xfrm>
-            <a:off x="457200" y="273050"/>
-            <a:ext cx="3008313" cy="1162050"/>
+            <a:off x="609601" y="273050"/>
+            <a:ext cx="4011084" cy="1162050"/>
           </a:xfrm>
         </p:spPr>
         <p:txBody>
@@ -2055,10 +2059,9 @@
           </a:lstStyle>
           <a:p>
             <a:r>
-              <a:rPr lang="zh-TW" altLang="en-US" smtClean="0"/>
+              <a:rPr lang="zh-TW" altLang="en-US"/>
               <a:t>按一下以編輯母片標題樣式</a:t>
             </a:r>
-            <a:endParaRPr lang="zh-TW" altLang="en-US"/>
           </a:p>
         </p:txBody>
       </p:sp>
@@ -2074,8 +2077,8 @@
         </p:nvSpPr>
         <p:spPr>
           <a:xfrm>
-            <a:off x="3575050" y="273050"/>
-            <a:ext cx="5111750" cy="5853113"/>
+            <a:off x="4766733" y="273051"/>
+            <a:ext cx="6815667" cy="5853113"/>
           </a:xfrm>
         </p:spPr>
         <p:txBody>
@@ -2112,38 +2115,37 @@
           <a:p>
             <a:pPr lvl="0"/>
             <a:r>
-              <a:rPr lang="zh-TW" altLang="en-US" smtClean="0"/>
+              <a:rPr lang="zh-TW" altLang="en-US"/>
               <a:t>按一下以編輯母片文字樣式</a:t>
             </a:r>
           </a:p>
           <a:p>
             <a:pPr lvl="1"/>
             <a:r>
-              <a:rPr lang="zh-TW" altLang="en-US" smtClean="0"/>
+              <a:rPr lang="zh-TW" altLang="en-US"/>
               <a:t>第二層</a:t>
             </a:r>
           </a:p>
           <a:p>
             <a:pPr lvl="2"/>
             <a:r>
-              <a:rPr lang="zh-TW" altLang="en-US" smtClean="0"/>
+              <a:rPr lang="zh-TW" altLang="en-US"/>
               <a:t>第三層</a:t>
             </a:r>
           </a:p>
           <a:p>
             <a:pPr lvl="3"/>
             <a:r>
-              <a:rPr lang="zh-TW" altLang="en-US" smtClean="0"/>
+              <a:rPr lang="zh-TW" altLang="en-US"/>
               <a:t>第四層</a:t>
             </a:r>
           </a:p>
           <a:p>
             <a:pPr lvl="4"/>
             <a:r>
-              <a:rPr lang="zh-TW" altLang="en-US" smtClean="0"/>
+              <a:rPr lang="zh-TW" altLang="en-US"/>
               <a:t>第五層</a:t>
             </a:r>
-            <a:endParaRPr lang="zh-TW" altLang="en-US"/>
           </a:p>
         </p:txBody>
       </p:sp>
@@ -2159,8 +2161,8 @@
         </p:nvSpPr>
         <p:spPr>
           <a:xfrm>
-            <a:off x="457200" y="1435100"/>
-            <a:ext cx="3008313" cy="4691063"/>
+            <a:off x="609601" y="1435101"/>
+            <a:ext cx="4011084" cy="4691063"/>
           </a:xfrm>
         </p:spPr>
         <p:txBody>
@@ -2206,7 +2208,7 @@
           <a:p>
             <a:pPr lvl="0"/>
             <a:r>
-              <a:rPr lang="zh-TW" altLang="en-US" smtClean="0"/>
+              <a:rPr lang="zh-TW" altLang="en-US"/>
               <a:t>按一下以編輯母片文字樣式</a:t>
             </a:r>
           </a:p>
@@ -2230,7 +2232,7 @@
             <a:fld id="{D63DAF70-B339-47C6-97E2-A0E7000C2544}" type="datetimeFigureOut">
               <a:rPr lang="zh-TW" altLang="en-US" smtClean="0"/>
               <a:pPr/>
-              <a:t>2017/10/7</a:t>
+              <a:t>2024/4/13</a:t>
             </a:fld>
             <a:endParaRPr lang="zh-TW" altLang="en-US"/>
           </a:p>
@@ -2316,8 +2318,8 @@
         </p:nvSpPr>
         <p:spPr>
           <a:xfrm>
-            <a:off x="1792288" y="4800600"/>
-            <a:ext cx="5486400" cy="566738"/>
+            <a:off x="2389717" y="4800600"/>
+            <a:ext cx="7315200" cy="566738"/>
           </a:xfrm>
         </p:spPr>
         <p:txBody>
@@ -2329,10 +2331,9 @@
           </a:lstStyle>
           <a:p>
             <a:r>
-              <a:rPr lang="zh-TW" altLang="en-US" smtClean="0"/>
+              <a:rPr lang="zh-TW" altLang="en-US"/>
               <a:t>按一下以編輯母片標題樣式</a:t>
             </a:r>
-            <a:endParaRPr lang="zh-TW" altLang="en-US"/>
           </a:p>
         </p:txBody>
       </p:sp>
@@ -2348,8 +2349,8 @@
         </p:nvSpPr>
         <p:spPr>
           <a:xfrm>
-            <a:off x="1792288" y="612775"/>
-            <a:ext cx="5486400" cy="4114800"/>
+            <a:off x="2389717" y="612775"/>
+            <a:ext cx="7315200" cy="4114800"/>
           </a:xfrm>
         </p:spPr>
         <p:txBody>
@@ -2394,10 +2395,9 @@
           </a:lstStyle>
           <a:p>
             <a:r>
-              <a:rPr lang="zh-TW" altLang="en-US" smtClean="0"/>
+              <a:rPr lang="zh-TW" altLang="en-US"/>
               <a:t>按一下圖示以新增圖片</a:t>
             </a:r>
-            <a:endParaRPr lang="zh-TW" altLang="en-US"/>
           </a:p>
         </p:txBody>
       </p:sp>
@@ -2413,8 +2413,8 @@
         </p:nvSpPr>
         <p:spPr>
           <a:xfrm>
-            <a:off x="1792288" y="5367338"/>
-            <a:ext cx="5486400" cy="804862"/>
+            <a:off x="2389717" y="5367338"/>
+            <a:ext cx="7315200" cy="804862"/>
           </a:xfrm>
         </p:spPr>
         <p:txBody>
@@ -2460,7 +2460,7 @@
           <a:p>
             <a:pPr lvl="0"/>
             <a:r>
-              <a:rPr lang="zh-TW" altLang="en-US" smtClean="0"/>
+              <a:rPr lang="zh-TW" altLang="en-US"/>
               <a:t>按一下以編輯母片文字樣式</a:t>
             </a:r>
           </a:p>
@@ -2484,7 +2484,7 @@
             <a:fld id="{D63DAF70-B339-47C6-97E2-A0E7000C2544}" type="datetimeFigureOut">
               <a:rPr lang="zh-TW" altLang="en-US" smtClean="0"/>
               <a:pPr/>
-              <a:t>2017/10/7</a:t>
+              <a:t>2024/4/13</a:t>
             </a:fld>
             <a:endParaRPr lang="zh-TW" altLang="en-US"/>
           </a:p>
@@ -2580,8 +2580,8 @@
         </p:nvSpPr>
         <p:spPr>
           <a:xfrm>
-            <a:off x="457200" y="274638"/>
-            <a:ext cx="8229600" cy="1143000"/>
+            <a:off x="609600" y="274638"/>
+            <a:ext cx="10972800" cy="1143000"/>
           </a:xfrm>
           <a:prstGeom prst="rect">
             <a:avLst/>
@@ -2594,10 +2594,9 @@
           <a:lstStyle/>
           <a:p>
             <a:r>
-              <a:rPr lang="zh-TW" altLang="en-US" smtClean="0"/>
+              <a:rPr lang="zh-TW" altLang="en-US"/>
               <a:t>按一下以編輯母片標題樣式</a:t>
             </a:r>
-            <a:endParaRPr lang="zh-TW" altLang="en-US"/>
           </a:p>
         </p:txBody>
       </p:sp>
@@ -2613,8 +2612,8 @@
         </p:nvSpPr>
         <p:spPr>
           <a:xfrm>
-            <a:off x="457200" y="1600200"/>
-            <a:ext cx="8229600" cy="4525963"/>
+            <a:off x="609600" y="1600201"/>
+            <a:ext cx="10972800" cy="4525963"/>
           </a:xfrm>
           <a:prstGeom prst="rect">
             <a:avLst/>
@@ -2628,38 +2627,37 @@
           <a:p>
             <a:pPr lvl="0"/>
             <a:r>
-              <a:rPr lang="zh-TW" altLang="en-US" smtClean="0"/>
+              <a:rPr lang="zh-TW" altLang="en-US"/>
               <a:t>按一下以編輯母片文字樣式</a:t>
             </a:r>
           </a:p>
           <a:p>
             <a:pPr lvl="1"/>
             <a:r>
-              <a:rPr lang="zh-TW" altLang="en-US" smtClean="0"/>
+              <a:rPr lang="zh-TW" altLang="en-US"/>
               <a:t>第二層</a:t>
             </a:r>
           </a:p>
           <a:p>
             <a:pPr lvl="2"/>
             <a:r>
-              <a:rPr lang="zh-TW" altLang="en-US" smtClean="0"/>
+              <a:rPr lang="zh-TW" altLang="en-US"/>
               <a:t>第三層</a:t>
             </a:r>
           </a:p>
           <a:p>
             <a:pPr lvl="3"/>
             <a:r>
-              <a:rPr lang="zh-TW" altLang="en-US" smtClean="0"/>
+              <a:rPr lang="zh-TW" altLang="en-US"/>
               <a:t>第四層</a:t>
             </a:r>
           </a:p>
           <a:p>
             <a:pPr lvl="4"/>
             <a:r>
-              <a:rPr lang="zh-TW" altLang="en-US" smtClean="0"/>
+              <a:rPr lang="zh-TW" altLang="en-US"/>
               <a:t>第五層</a:t>
             </a:r>
-            <a:endParaRPr lang="zh-TW" altLang="en-US"/>
           </a:p>
         </p:txBody>
       </p:sp>
@@ -2675,8 +2673,8 @@
         </p:nvSpPr>
         <p:spPr>
           <a:xfrm>
-            <a:off x="457200" y="6356350"/>
-            <a:ext cx="2133600" cy="365125"/>
+            <a:off x="609600" y="6356351"/>
+            <a:ext cx="2844800" cy="365125"/>
           </a:xfrm>
           <a:prstGeom prst="rect">
             <a:avLst/>
@@ -2699,7 +2697,7 @@
             <a:fld id="{D63DAF70-B339-47C6-97E2-A0E7000C2544}" type="datetimeFigureOut">
               <a:rPr lang="zh-TW" altLang="en-US" smtClean="0"/>
               <a:pPr/>
-              <a:t>2017/10/7</a:t>
+              <a:t>2024/4/13</a:t>
             </a:fld>
             <a:endParaRPr lang="zh-TW" altLang="en-US"/>
           </a:p>
@@ -2717,8 +2715,8 @@
         </p:nvSpPr>
         <p:spPr>
           <a:xfrm>
-            <a:off x="3124200" y="6356350"/>
-            <a:ext cx="2895600" cy="365125"/>
+            <a:off x="4165600" y="6356351"/>
+            <a:ext cx="3860800" cy="365125"/>
           </a:xfrm>
           <a:prstGeom prst="rect">
             <a:avLst/>
@@ -2754,8 +2752,8 @@
         </p:nvSpPr>
         <p:spPr>
           <a:xfrm>
-            <a:off x="6553200" y="6356350"/>
-            <a:ext cx="2133600" cy="365125"/>
+            <a:off x="8737600" y="6356351"/>
+            <a:ext cx="2844800" cy="365125"/>
           </a:xfrm>
           <a:prstGeom prst="rect">
             <a:avLst/>
@@ -3080,179 +3078,34 @@
             <p:ph type="title"/>
           </p:nvPr>
         </p:nvSpPr>
-        <p:spPr/>
-        <p:txBody>
-          <a:bodyPr/>
-          <a:lstStyle/>
-          <a:p>
-            <a:r>
-              <a:rPr lang="zh-TW" altLang="en-US" b="1" dirty="0">
+        <p:spPr>
+          <a:xfrm>
+            <a:off x="0" y="2660915"/>
+            <a:ext cx="12192000" cy="1143000"/>
+          </a:xfrm>
+        </p:spPr>
+        <p:txBody>
+          <a:bodyPr>
+            <a:noAutofit/>
+          </a:bodyPr>
+          <a:lstStyle/>
+          <a:p>
+            <a:r>
+              <a:rPr lang="zh-TW" altLang="en-US" sz="7200" b="1" i="1" dirty="0">
                 <a:solidFill>
                   <a:srgbClr val="660033"/>
                 </a:solidFill>
+                <a:effectLst>
+                  <a:outerShdw blurRad="38100" dist="38100" dir="2700000" algn="tl">
+                    <a:srgbClr val="000000">
+                      <a:alpha val="43137"/>
+                    </a:srgbClr>
+                  </a:outerShdw>
+                </a:effectLst>
                 <a:latin typeface="微軟正黑體" pitchFamily="34" charset="-120"/>
                 <a:ea typeface="微軟正黑體" pitchFamily="34" charset="-120"/>
               </a:rPr>
               <a:t>盡情的敬拜</a:t>
-            </a:r>
-          </a:p>
-        </p:txBody>
-      </p:sp>
-      <p:sp>
-        <p:nvSpPr>
-          <p:cNvPr id="5" name="內容版面配置區 4"/>
-          <p:cNvSpPr>
-            <a:spLocks noGrp="1"/>
-          </p:cNvSpPr>
-          <p:nvPr>
-            <p:ph idx="1"/>
-          </p:nvPr>
-        </p:nvSpPr>
-        <p:spPr/>
-        <p:txBody>
-          <a:bodyPr>
-            <a:normAutofit/>
-          </a:bodyPr>
-          <a:lstStyle/>
-          <a:p>
-            <a:pPr algn="ctr">
-              <a:buNone/>
-            </a:pPr>
-            <a:r>
-              <a:rPr lang="zh-TW" altLang="en-US" sz="5400" b="1" dirty="0">
-                <a:solidFill>
-                  <a:srgbClr val="660033"/>
-                </a:solidFill>
-                <a:latin typeface="微軟正黑體" pitchFamily="34" charset="-120"/>
-                <a:ea typeface="微軟正黑體" pitchFamily="34" charset="-120"/>
-              </a:rPr>
-              <a:t>耶穌聖潔公義</a:t>
-            </a:r>
-            <a:r>
-              <a:rPr lang="zh-TW" altLang="en-US" sz="5400" b="1" dirty="0" smtClean="0">
-                <a:solidFill>
-                  <a:srgbClr val="660033"/>
-                </a:solidFill>
-                <a:latin typeface="微軟正黑體" pitchFamily="34" charset="-120"/>
-                <a:ea typeface="微軟正黑體" pitchFamily="34" charset="-120"/>
-              </a:rPr>
-              <a:t>救主</a:t>
-            </a:r>
-            <a:endParaRPr lang="en-US" altLang="zh-TW" sz="5400" b="1" dirty="0" smtClean="0">
-              <a:solidFill>
-                <a:srgbClr val="660033"/>
-              </a:solidFill>
-              <a:latin typeface="微軟正黑體" pitchFamily="34" charset="-120"/>
-              <a:ea typeface="微軟正黑體" pitchFamily="34" charset="-120"/>
-            </a:endParaRPr>
-          </a:p>
-          <a:p>
-            <a:pPr algn="ctr">
-              <a:buNone/>
-            </a:pPr>
-            <a:r>
-              <a:rPr lang="zh-TW" altLang="en-US" sz="5400" b="1" dirty="0" smtClean="0">
-                <a:solidFill>
-                  <a:srgbClr val="660033"/>
-                </a:solidFill>
-                <a:latin typeface="微軟正黑體" pitchFamily="34" charset="-120"/>
-                <a:ea typeface="微軟正黑體" pitchFamily="34" charset="-120"/>
-              </a:rPr>
-              <a:t>彰顯</a:t>
-            </a:r>
-            <a:r>
-              <a:rPr lang="zh-TW" altLang="en-US" sz="5400" b="1" dirty="0">
-                <a:solidFill>
-                  <a:srgbClr val="660033"/>
-                </a:solidFill>
-                <a:latin typeface="微軟正黑體" pitchFamily="34" charset="-120"/>
-                <a:ea typeface="微軟正黑體" pitchFamily="34" charset="-120"/>
-              </a:rPr>
-              <a:t>神的智慧</a:t>
-            </a:r>
-            <a:r>
-              <a:rPr lang="zh-TW" altLang="en-US" sz="5400" b="1" dirty="0" smtClean="0">
-                <a:solidFill>
-                  <a:srgbClr val="660033"/>
-                </a:solidFill>
-                <a:latin typeface="微軟正黑體" pitchFamily="34" charset="-120"/>
-                <a:ea typeface="微軟正黑體" pitchFamily="34" charset="-120"/>
-              </a:rPr>
-              <a:t>能力</a:t>
-            </a:r>
-            <a:endParaRPr lang="en-US" altLang="zh-TW" sz="5400" b="1" dirty="0">
-              <a:solidFill>
-                <a:srgbClr val="660033"/>
-              </a:solidFill>
-              <a:latin typeface="微軟正黑體" pitchFamily="34" charset="-120"/>
-              <a:ea typeface="微軟正黑體" pitchFamily="34" charset="-120"/>
-            </a:endParaRPr>
-          </a:p>
-          <a:p>
-            <a:pPr algn="ctr">
-              <a:buNone/>
-            </a:pPr>
-            <a:r>
-              <a:rPr lang="zh-TW" altLang="en-US" sz="5400" b="1" dirty="0" smtClean="0">
-                <a:solidFill>
-                  <a:srgbClr val="660033"/>
-                </a:solidFill>
-                <a:latin typeface="微軟正黑體" pitchFamily="34" charset="-120"/>
-                <a:ea typeface="微軟正黑體" pitchFamily="34" charset="-120"/>
-              </a:rPr>
-              <a:t>你</a:t>
-            </a:r>
-            <a:r>
-              <a:rPr lang="zh-TW" altLang="en-US" sz="5400" b="1" dirty="0">
-                <a:solidFill>
-                  <a:srgbClr val="660033"/>
-                </a:solidFill>
-                <a:latin typeface="微軟正黑體" pitchFamily="34" charset="-120"/>
-                <a:ea typeface="微軟正黑體" pitchFamily="34" charset="-120"/>
-              </a:rPr>
-              <a:t>的愛是何等長闊</a:t>
-            </a:r>
-            <a:r>
-              <a:rPr lang="zh-TW" altLang="en-US" sz="5400" b="1" dirty="0" smtClean="0">
-                <a:solidFill>
-                  <a:srgbClr val="660033"/>
-                </a:solidFill>
-                <a:latin typeface="微軟正黑體" pitchFamily="34" charset="-120"/>
-                <a:ea typeface="微軟正黑體" pitchFamily="34" charset="-120"/>
-              </a:rPr>
-              <a:t>高深</a:t>
-            </a:r>
-            <a:endParaRPr lang="en-US" altLang="zh-TW" sz="5400" b="1" dirty="0" smtClean="0">
-              <a:solidFill>
-                <a:srgbClr val="660033"/>
-              </a:solidFill>
-              <a:latin typeface="微軟正黑體" pitchFamily="34" charset="-120"/>
-              <a:ea typeface="微軟正黑體" pitchFamily="34" charset="-120"/>
-            </a:endParaRPr>
-          </a:p>
-          <a:p>
-            <a:pPr algn="ctr">
-              <a:buNone/>
-            </a:pPr>
-            <a:r>
-              <a:rPr lang="zh-TW" altLang="en-US" sz="5400" b="1" dirty="0" smtClean="0">
-                <a:solidFill>
-                  <a:srgbClr val="660033"/>
-                </a:solidFill>
-                <a:latin typeface="微軟正黑體" pitchFamily="34" charset="-120"/>
-                <a:ea typeface="微軟正黑體" pitchFamily="34" charset="-120"/>
-              </a:rPr>
-              <a:t>滿</a:t>
-            </a:r>
-            <a:r>
-              <a:rPr lang="zh-TW" altLang="en-US" sz="5400" b="1" dirty="0">
-                <a:solidFill>
-                  <a:srgbClr val="660033"/>
-                </a:solidFill>
-                <a:latin typeface="微軟正黑體" pitchFamily="34" charset="-120"/>
-                <a:ea typeface="微軟正黑體" pitchFamily="34" charset="-120"/>
-              </a:rPr>
-              <a:t>有豐富無窮的恩典</a:t>
             </a:r>
           </a:p>
         </p:txBody>
@@ -3284,73 +3137,40 @@
       </p:grpSpPr>
       <p:sp>
         <p:nvSpPr>
-          <p:cNvPr id="4" name="標題 3"/>
-          <p:cNvSpPr>
-            <a:spLocks noGrp="1"/>
-          </p:cNvSpPr>
-          <p:nvPr>
-            <p:ph type="title"/>
-          </p:nvPr>
-        </p:nvSpPr>
-        <p:spPr/>
-        <p:txBody>
-          <a:bodyPr/>
-          <a:lstStyle/>
-          <a:p>
-            <a:r>
-              <a:rPr lang="zh-TW" altLang="en-US" b="1" dirty="0">
+          <p:cNvPr id="5" name="內容版面配置區 4"/>
+          <p:cNvSpPr>
+            <a:spLocks noGrp="1"/>
+          </p:cNvSpPr>
+          <p:nvPr>
+            <p:ph idx="1"/>
+          </p:nvPr>
+        </p:nvSpPr>
+        <p:spPr>
+          <a:xfrm>
+            <a:off x="0" y="2084851"/>
+            <a:ext cx="12192000" cy="2404863"/>
+          </a:xfrm>
+        </p:spPr>
+        <p:txBody>
+          <a:bodyPr anchor="ctr">
+            <a:normAutofit/>
+          </a:bodyPr>
+          <a:lstStyle/>
+          <a:p>
+            <a:pPr algn="ctr">
+              <a:buNone/>
+            </a:pPr>
+            <a:r>
+              <a:rPr lang="zh-TW" altLang="en-US" sz="6400" b="1" dirty="0">
                 <a:solidFill>
                   <a:srgbClr val="660033"/>
                 </a:solidFill>
                 <a:latin typeface="微軟正黑體" pitchFamily="34" charset="-120"/>
                 <a:ea typeface="微軟正黑體" pitchFamily="34" charset="-120"/>
               </a:rPr>
-              <a:t>盡情的敬拜</a:t>
-            </a:r>
-          </a:p>
-        </p:txBody>
-      </p:sp>
-      <p:sp>
-        <p:nvSpPr>
-          <p:cNvPr id="5" name="內容版面配置區 4"/>
-          <p:cNvSpPr>
-            <a:spLocks noGrp="1"/>
-          </p:cNvSpPr>
-          <p:nvPr>
-            <p:ph idx="1"/>
-          </p:nvPr>
-        </p:nvSpPr>
-        <p:spPr/>
-        <p:txBody>
-          <a:bodyPr>
-            <a:normAutofit/>
-          </a:bodyPr>
-          <a:lstStyle/>
-          <a:p>
-            <a:pPr algn="ctr">
-              <a:buNone/>
-            </a:pPr>
-            <a:r>
-              <a:rPr lang="zh-TW" altLang="en-US" sz="5400" b="1" dirty="0">
-                <a:solidFill>
-                  <a:srgbClr val="660033"/>
-                </a:solidFill>
-                <a:latin typeface="微軟正黑體" pitchFamily="34" charset="-120"/>
-                <a:ea typeface="微軟正黑體" pitchFamily="34" charset="-120"/>
-              </a:rPr>
-              <a:t>耶穌權柄統管萬</a:t>
-            </a:r>
-            <a:r>
-              <a:rPr lang="zh-TW" altLang="en-US" sz="5400" b="1" dirty="0" smtClean="0">
-                <a:solidFill>
-                  <a:srgbClr val="660033"/>
-                </a:solidFill>
-                <a:latin typeface="微軟正黑體" pitchFamily="34" charset="-120"/>
-                <a:ea typeface="微軟正黑體" pitchFamily="34" charset="-120"/>
-              </a:rPr>
-              <a:t>有</a:t>
-            </a:r>
-            <a:endParaRPr lang="en-US" altLang="zh-TW" sz="5400" b="1" dirty="0" smtClean="0">
+              <a:t>耶穌聖潔公義救主</a:t>
+            </a:r>
+            <a:endParaRPr lang="en-US" altLang="zh-TW" sz="6400" b="1" dirty="0">
               <a:solidFill>
                 <a:srgbClr val="660033"/>
               </a:solidFill>
@@ -3363,36 +3183,16 @@
               <a:buNone/>
             </a:pPr>
             <a:r>
-              <a:rPr lang="zh-TW" altLang="en-US" sz="5400" b="1" dirty="0" smtClean="0">
+              <a:rPr lang="zh-TW" altLang="en-US" sz="6400" b="1" dirty="0">
                 <a:solidFill>
                   <a:srgbClr val="660033"/>
                 </a:solidFill>
                 <a:latin typeface="微軟正黑體" pitchFamily="34" charset="-120"/>
                 <a:ea typeface="微軟正黑體" pitchFamily="34" charset="-120"/>
               </a:rPr>
-              <a:t>配</a:t>
-            </a:r>
-            <a:r>
-              <a:rPr lang="zh-TW" altLang="en-US" sz="5400" b="1" dirty="0">
-                <a:solidFill>
-                  <a:srgbClr val="660033"/>
-                </a:solidFill>
-                <a:latin typeface="微軟正黑體" pitchFamily="34" charset="-120"/>
-                <a:ea typeface="微軟正黑體" pitchFamily="34" charset="-120"/>
-              </a:rPr>
-              <a:t>得榮耀尊貴</a:t>
-            </a:r>
-            <a:r>
-              <a:rPr lang="zh-TW" altLang="en-US" sz="5400" b="1" dirty="0" smtClean="0">
-                <a:solidFill>
-                  <a:srgbClr val="660033"/>
-                </a:solidFill>
-                <a:latin typeface="微軟正黑體" pitchFamily="34" charset="-120"/>
-                <a:ea typeface="微軟正黑體" pitchFamily="34" charset="-120"/>
-              </a:rPr>
-              <a:t>頌讚</a:t>
-            </a:r>
-            <a:endParaRPr lang="en-US" altLang="zh-TW" sz="5400" b="1" dirty="0">
+              <a:t>彰顯神的智慧能力</a:t>
+            </a:r>
+            <a:endParaRPr lang="en-US" altLang="zh-TW" sz="6400" b="1" dirty="0">
               <a:solidFill>
                 <a:srgbClr val="660033"/>
               </a:solidFill>
@@ -3400,72 +3200,67 @@
               <a:ea typeface="微軟正黑體" pitchFamily="34" charset="-120"/>
             </a:endParaRPr>
           </a:p>
-          <a:p>
-            <a:pPr algn="ctr">
-              <a:buNone/>
-            </a:pPr>
-            <a:r>
-              <a:rPr lang="zh-TW" altLang="en-US" sz="5400" b="1" dirty="0" smtClean="0">
+        </p:txBody>
+      </p:sp>
+      <p:sp>
+        <p:nvSpPr>
+          <p:cNvPr id="3" name="TextBox 2"/>
+          <p:cNvSpPr txBox="1"/>
+          <p:nvPr/>
+        </p:nvSpPr>
+        <p:spPr>
+          <a:xfrm>
+            <a:off x="0" y="5157193"/>
+            <a:ext cx="12192000" cy="584775"/>
+          </a:xfrm>
+          <a:prstGeom prst="rect">
+            <a:avLst/>
+          </a:prstGeom>
+          <a:noFill/>
+        </p:spPr>
+        <p:txBody>
+          <a:bodyPr wrap="square" rtlCol="0">
+            <a:spAutoFit/>
+          </a:bodyPr>
+          <a:lstStyle/>
+          <a:p>
+            <a:pPr algn="ctr"/>
+            <a:r>
+              <a:rPr lang="en-US" sz="3200" b="1" dirty="0">
                 <a:solidFill>
                   <a:srgbClr val="660033"/>
                 </a:solidFill>
-                <a:latin typeface="微軟正黑體" pitchFamily="34" charset="-120"/>
-                <a:ea typeface="微軟正黑體" pitchFamily="34" charset="-120"/>
+                <a:latin typeface="Microsoft JhengHei" panose="020B0604030504040204" pitchFamily="34" charset="-120"/>
+                <a:ea typeface="Microsoft JhengHei" panose="020B0604030504040204" pitchFamily="34" charset="-120"/>
               </a:rPr>
-              <a:t>我</a:t>
-            </a:r>
-            <a:r>
-              <a:rPr lang="zh-TW" altLang="en-US" sz="5400" b="1" dirty="0">
+              <a:t>( </a:t>
+            </a:r>
+            <a:r>
+              <a:rPr lang="zh-CN" altLang="en-US" sz="3200" b="1" dirty="0">
                 <a:solidFill>
                   <a:srgbClr val="660033"/>
                 </a:solidFill>
-                <a:latin typeface="微軟正黑體" pitchFamily="34" charset="-120"/>
-                <a:ea typeface="微軟正黑體" pitchFamily="34" charset="-120"/>
+                <a:latin typeface="Microsoft JhengHei" panose="020B0604030504040204" pitchFamily="34" charset="-120"/>
+                <a:ea typeface="Microsoft JhengHei" panose="020B0604030504040204" pitchFamily="34" charset="-120"/>
               </a:rPr>
-              <a:t>以心靈誠實盡情敬</a:t>
-            </a:r>
-            <a:r>
-              <a:rPr lang="zh-TW" altLang="en-US" sz="5400" b="1" dirty="0" smtClean="0">
+              <a:t>正歌</a:t>
+            </a:r>
+            <a:r>
+              <a:rPr lang="en-US" sz="3200" b="1" dirty="0">
                 <a:solidFill>
                   <a:srgbClr val="660033"/>
                 </a:solidFill>
-                <a:latin typeface="微軟正黑體" pitchFamily="34" charset="-120"/>
-                <a:ea typeface="微軟正黑體" pitchFamily="34" charset="-120"/>
+                <a:latin typeface="Microsoft JhengHei" panose="020B0604030504040204" pitchFamily="34" charset="-120"/>
+                <a:ea typeface="Microsoft JhengHei" panose="020B0604030504040204" pitchFamily="34" charset="-120"/>
               </a:rPr>
-              <a:t>拜</a:t>
-            </a:r>
-            <a:endParaRPr lang="en-US" altLang="zh-TW" sz="5400" b="1" dirty="0" smtClean="0">
+              <a:t> )</a:t>
+            </a:r>
+            <a:endParaRPr lang="vi-VN" sz="3200" b="1" dirty="0">
               <a:solidFill>
                 <a:srgbClr val="660033"/>
               </a:solidFill>
-              <a:latin typeface="微軟正黑體" pitchFamily="34" charset="-120"/>
-              <a:ea typeface="微軟正黑體" pitchFamily="34" charset="-120"/>
+              <a:ea typeface="Microsoft JhengHei" panose="020B0604030504040204" pitchFamily="34" charset="-120"/>
             </a:endParaRPr>
-          </a:p>
-          <a:p>
-            <a:pPr algn="ctr">
-              <a:buNone/>
-            </a:pPr>
-            <a:r>
-              <a:rPr lang="zh-TW" altLang="en-US" sz="5400" b="1" dirty="0" smtClean="0">
-                <a:solidFill>
-                  <a:srgbClr val="660033"/>
-                </a:solidFill>
-                <a:latin typeface="微軟正黑體" pitchFamily="34" charset="-120"/>
-                <a:ea typeface="微軟正黑體" pitchFamily="34" charset="-120"/>
-              </a:rPr>
-              <a:t>坐</a:t>
-            </a:r>
-            <a:r>
-              <a:rPr lang="zh-TW" altLang="en-US" sz="5400" b="1" dirty="0">
-                <a:solidFill>
-                  <a:srgbClr val="660033"/>
-                </a:solidFill>
-                <a:latin typeface="微軟正黑體" pitchFamily="34" charset="-120"/>
-                <a:ea typeface="微軟正黑體" pitchFamily="34" charset="-120"/>
-              </a:rPr>
-              <a:t>在寶座上深愛我的主</a:t>
-            </a:r>
           </a:p>
         </p:txBody>
       </p:sp>
@@ -3496,73 +3291,40 @@
       </p:grpSpPr>
       <p:sp>
         <p:nvSpPr>
-          <p:cNvPr id="4" name="標題 3"/>
-          <p:cNvSpPr>
-            <a:spLocks noGrp="1"/>
-          </p:cNvSpPr>
-          <p:nvPr>
-            <p:ph type="title"/>
-          </p:nvPr>
-        </p:nvSpPr>
-        <p:spPr/>
-        <p:txBody>
-          <a:bodyPr/>
-          <a:lstStyle/>
-          <a:p>
-            <a:r>
-              <a:rPr lang="zh-TW" altLang="en-US" b="1" dirty="0">
+          <p:cNvPr id="5" name="內容版面配置區 4"/>
+          <p:cNvSpPr>
+            <a:spLocks noGrp="1"/>
+          </p:cNvSpPr>
+          <p:nvPr>
+            <p:ph idx="1"/>
+          </p:nvPr>
+        </p:nvSpPr>
+        <p:spPr>
+          <a:xfrm>
+            <a:off x="0" y="2084851"/>
+            <a:ext cx="12192000" cy="2404863"/>
+          </a:xfrm>
+        </p:spPr>
+        <p:txBody>
+          <a:bodyPr anchor="ctr">
+            <a:normAutofit/>
+          </a:bodyPr>
+          <a:lstStyle/>
+          <a:p>
+            <a:pPr algn="ctr">
+              <a:buNone/>
+            </a:pPr>
+            <a:r>
+              <a:rPr lang="zh-TW" altLang="en-US" sz="6400" b="1" dirty="0">
                 <a:solidFill>
                   <a:srgbClr val="660033"/>
                 </a:solidFill>
                 <a:latin typeface="微軟正黑體" pitchFamily="34" charset="-120"/>
                 <a:ea typeface="微軟正黑體" pitchFamily="34" charset="-120"/>
               </a:rPr>
-              <a:t>盡情的敬拜</a:t>
-            </a:r>
-          </a:p>
-        </p:txBody>
-      </p:sp>
-      <p:sp>
-        <p:nvSpPr>
-          <p:cNvPr id="5" name="內容版面配置區 4"/>
-          <p:cNvSpPr>
-            <a:spLocks noGrp="1"/>
-          </p:cNvSpPr>
-          <p:nvPr>
-            <p:ph idx="1"/>
-          </p:nvPr>
-        </p:nvSpPr>
-        <p:spPr/>
-        <p:txBody>
-          <a:bodyPr>
-            <a:normAutofit/>
-          </a:bodyPr>
-          <a:lstStyle/>
-          <a:p>
-            <a:pPr algn="ctr">
-              <a:buNone/>
-            </a:pPr>
-            <a:r>
-              <a:rPr lang="zh-TW" altLang="en-US" sz="5400" b="1" dirty="0">
-                <a:solidFill>
-                  <a:srgbClr val="660033"/>
-                </a:solidFill>
-                <a:latin typeface="微軟正黑體" pitchFamily="34" charset="-120"/>
-                <a:ea typeface="微軟正黑體" pitchFamily="34" charset="-120"/>
-              </a:rPr>
-              <a:t>舉起我的心來敬拜</a:t>
-            </a:r>
-            <a:r>
-              <a:rPr lang="zh-TW" altLang="en-US" sz="5400" b="1" dirty="0" smtClean="0">
-                <a:solidFill>
-                  <a:srgbClr val="660033"/>
-                </a:solidFill>
-                <a:latin typeface="微軟正黑體" pitchFamily="34" charset="-120"/>
-                <a:ea typeface="微軟正黑體" pitchFamily="34" charset="-120"/>
-              </a:rPr>
-              <a:t>你</a:t>
-            </a:r>
-            <a:endParaRPr lang="en-US" altLang="zh-TW" sz="5400" b="1" dirty="0" smtClean="0">
+              <a:t>祢的愛是何等長闊高深</a:t>
+            </a:r>
+            <a:endParaRPr lang="en-US" altLang="zh-TW" sz="6400" b="1" dirty="0">
               <a:solidFill>
                 <a:srgbClr val="660033"/>
               </a:solidFill>
@@ -3575,36 +3337,146 @@
               <a:buNone/>
             </a:pPr>
             <a:r>
-              <a:rPr lang="zh-TW" altLang="en-US" sz="5400" b="1" dirty="0" smtClean="0">
+              <a:rPr lang="zh-TW" altLang="en-US" sz="6400" b="1" dirty="0">
                 <a:solidFill>
                   <a:srgbClr val="660033"/>
                 </a:solidFill>
                 <a:latin typeface="微軟正黑體" pitchFamily="34" charset="-120"/>
                 <a:ea typeface="微軟正黑體" pitchFamily="34" charset="-120"/>
               </a:rPr>
-              <a:t>用</a:t>
-            </a:r>
-            <a:r>
-              <a:rPr lang="zh-TW" altLang="en-US" sz="5400" b="1" dirty="0">
+              <a:t>滿有豐富無窮的恩典</a:t>
+            </a:r>
+          </a:p>
+        </p:txBody>
+      </p:sp>
+      <p:sp>
+        <p:nvSpPr>
+          <p:cNvPr id="3" name="TextBox 2"/>
+          <p:cNvSpPr txBox="1"/>
+          <p:nvPr/>
+        </p:nvSpPr>
+        <p:spPr>
+          <a:xfrm>
+            <a:off x="0" y="5157193"/>
+            <a:ext cx="12192000" cy="584775"/>
+          </a:xfrm>
+          <a:prstGeom prst="rect">
+            <a:avLst/>
+          </a:prstGeom>
+          <a:noFill/>
+        </p:spPr>
+        <p:txBody>
+          <a:bodyPr wrap="square" rtlCol="0">
+            <a:spAutoFit/>
+          </a:bodyPr>
+          <a:lstStyle/>
+          <a:p>
+            <a:pPr algn="ctr"/>
+            <a:r>
+              <a:rPr lang="en-US" sz="3200" b="1" dirty="0">
+                <a:solidFill>
+                  <a:srgbClr val="660033"/>
+                </a:solidFill>
+                <a:latin typeface="Microsoft JhengHei" panose="020B0604030504040204" pitchFamily="34" charset="-120"/>
+                <a:ea typeface="Microsoft JhengHei" panose="020B0604030504040204" pitchFamily="34" charset="-120"/>
+              </a:rPr>
+              <a:t>( </a:t>
+            </a:r>
+            <a:r>
+              <a:rPr lang="zh-CN" altLang="en-US" sz="3200" b="1" dirty="0">
+                <a:solidFill>
+                  <a:srgbClr val="660033"/>
+                </a:solidFill>
+                <a:latin typeface="Microsoft JhengHei" panose="020B0604030504040204" pitchFamily="34" charset="-120"/>
+                <a:ea typeface="Microsoft JhengHei" panose="020B0604030504040204" pitchFamily="34" charset="-120"/>
+              </a:rPr>
+              <a:t>正歌</a:t>
+            </a:r>
+            <a:r>
+              <a:rPr lang="en-US" sz="3200" b="1" dirty="0">
+                <a:solidFill>
+                  <a:srgbClr val="660033"/>
+                </a:solidFill>
+                <a:latin typeface="Microsoft JhengHei" panose="020B0604030504040204" pitchFamily="34" charset="-120"/>
+                <a:ea typeface="Microsoft JhengHei" panose="020B0604030504040204" pitchFamily="34" charset="-120"/>
+              </a:rPr>
+              <a:t> )</a:t>
+            </a:r>
+            <a:endParaRPr lang="vi-VN" sz="3200" b="1" dirty="0">
+              <a:solidFill>
+                <a:srgbClr val="660033"/>
+              </a:solidFill>
+              <a:ea typeface="Microsoft JhengHei" panose="020B0604030504040204" pitchFamily="34" charset="-120"/>
+            </a:endParaRPr>
+          </a:p>
+        </p:txBody>
+      </p:sp>
+    </p:spTree>
+    <p:extLst>
+      <p:ext uri="{BB962C8B-B14F-4D97-AF65-F5344CB8AC3E}">
+        <p14:creationId xmlns:p14="http://schemas.microsoft.com/office/powerpoint/2010/main" val="304362163"/>
+      </p:ext>
+    </p:extLst>
+  </p:cSld>
+  <p:clrMapOvr>
+    <a:masterClrMapping/>
+  </p:clrMapOvr>
+</p:sld>
+</file>
+
+<file path=ppt/slides/slide4.xml><?xml version="1.0" encoding="utf-8"?>
+<p:sld xmlns:a="http://schemas.openxmlformats.org/drawingml/2006/main" xmlns:r="http://schemas.openxmlformats.org/officeDocument/2006/relationships" xmlns:p="http://schemas.openxmlformats.org/presentationml/2006/main">
+  <p:cSld>
+    <p:spTree>
+      <p:nvGrpSpPr>
+        <p:cNvPr id="1" name=""/>
+        <p:cNvGrpSpPr/>
+        <p:nvPr/>
+      </p:nvGrpSpPr>
+      <p:grpSpPr>
+        <a:xfrm>
+          <a:off x="0" y="0"/>
+          <a:ext cx="0" cy="0"/>
+          <a:chOff x="0" y="0"/>
+          <a:chExt cx="0" cy="0"/>
+        </a:xfrm>
+      </p:grpSpPr>
+      <p:sp>
+        <p:nvSpPr>
+          <p:cNvPr id="5" name="內容版面配置區 4"/>
+          <p:cNvSpPr>
+            <a:spLocks noGrp="1"/>
+          </p:cNvSpPr>
+          <p:nvPr>
+            <p:ph idx="1"/>
+          </p:nvPr>
+        </p:nvSpPr>
+        <p:spPr>
+          <a:xfrm>
+            <a:off x="0" y="2084851"/>
+            <a:ext cx="12192000" cy="2404863"/>
+          </a:xfrm>
+        </p:spPr>
+        <p:txBody>
+          <a:bodyPr anchor="ctr">
+            <a:normAutofit/>
+          </a:bodyPr>
+          <a:lstStyle/>
+          <a:p>
+            <a:pPr algn="ctr">
+              <a:buNone/>
+            </a:pPr>
+            <a:r>
+              <a:rPr lang="zh-TW" altLang="en-US" sz="6400" b="1" dirty="0">
                 <a:solidFill>
                   <a:srgbClr val="660033"/>
                 </a:solidFill>
                 <a:latin typeface="微軟正黑體" pitchFamily="34" charset="-120"/>
                 <a:ea typeface="微軟正黑體" pitchFamily="34" charset="-120"/>
               </a:rPr>
-              <a:t>生命來回應你的</a:t>
-            </a:r>
-            <a:r>
-              <a:rPr lang="zh-TW" altLang="en-US" sz="5400" b="1" dirty="0" smtClean="0">
-                <a:solidFill>
-                  <a:srgbClr val="660033"/>
-                </a:solidFill>
-                <a:latin typeface="微軟正黑體" pitchFamily="34" charset="-120"/>
-                <a:ea typeface="微軟正黑體" pitchFamily="34" charset="-120"/>
-              </a:rPr>
-              <a:t>愛</a:t>
-            </a:r>
-            <a:endParaRPr lang="en-US" altLang="zh-TW" sz="5400" b="1" dirty="0">
+              <a:t>耶穌權柄統管萬有</a:t>
+            </a:r>
+            <a:endParaRPr lang="en-US" altLang="zh-TW" sz="6400" b="1" dirty="0">
               <a:solidFill>
                 <a:srgbClr val="660033"/>
               </a:solidFill>
@@ -3617,56 +3489,16 @@
               <a:buNone/>
             </a:pPr>
             <a:r>
-              <a:rPr lang="zh-TW" altLang="en-US" sz="5400" b="1" dirty="0" smtClean="0">
+              <a:rPr lang="zh-TW" altLang="en-US" sz="6400" b="1" dirty="0">
                 <a:solidFill>
                   <a:srgbClr val="660033"/>
                 </a:solidFill>
                 <a:latin typeface="微軟正黑體" pitchFamily="34" charset="-120"/>
                 <a:ea typeface="微軟正黑體" pitchFamily="34" charset="-120"/>
               </a:rPr>
-              <a:t>哦  我</a:t>
-            </a:r>
-            <a:r>
-              <a:rPr lang="zh-TW" altLang="en-US" sz="5400" b="1" dirty="0">
-                <a:solidFill>
-                  <a:srgbClr val="660033"/>
-                </a:solidFill>
-                <a:latin typeface="微軟正黑體" pitchFamily="34" charset="-120"/>
-                <a:ea typeface="微軟正黑體" pitchFamily="34" charset="-120"/>
-              </a:rPr>
-              <a:t>的</a:t>
-            </a:r>
-            <a:r>
-              <a:rPr lang="zh-TW" altLang="en-US" sz="5400" b="1" dirty="0" smtClean="0">
-                <a:solidFill>
-                  <a:srgbClr val="660033"/>
-                </a:solidFill>
-                <a:latin typeface="微軟正黑體" pitchFamily="34" charset="-120"/>
-                <a:ea typeface="微軟正黑體" pitchFamily="34" charset="-120"/>
-              </a:rPr>
-              <a:t>主讓</a:t>
-            </a:r>
-            <a:r>
-              <a:rPr lang="zh-TW" altLang="en-US" sz="5400" b="1" dirty="0">
-                <a:solidFill>
-                  <a:srgbClr val="660033"/>
-                </a:solidFill>
-                <a:latin typeface="微軟正黑體" pitchFamily="34" charset="-120"/>
-                <a:ea typeface="微軟正黑體" pitchFamily="34" charset="-120"/>
-              </a:rPr>
-              <a:t>我單單在乎</a:t>
-            </a:r>
-            <a:r>
-              <a:rPr lang="zh-TW" altLang="en-US" sz="5400" b="1" dirty="0" smtClean="0">
-                <a:solidFill>
-                  <a:srgbClr val="660033"/>
-                </a:solidFill>
-                <a:latin typeface="微軟正黑體" pitchFamily="34" charset="-120"/>
-                <a:ea typeface="微軟正黑體" pitchFamily="34" charset="-120"/>
-              </a:rPr>
-              <a:t>你</a:t>
-            </a:r>
-            <a:endParaRPr lang="en-US" altLang="zh-TW" sz="5400" b="1" dirty="0" smtClean="0">
+              <a:t>配得榮耀尊貴頌讚</a:t>
+            </a:r>
+            <a:endParaRPr lang="en-US" altLang="zh-TW" sz="6400" b="1" dirty="0">
               <a:solidFill>
                 <a:srgbClr val="660033"/>
               </a:solidFill>
@@ -3674,34 +3506,539 @@
               <a:ea typeface="微軟正黑體" pitchFamily="34" charset="-120"/>
             </a:endParaRPr>
           </a:p>
+        </p:txBody>
+      </p:sp>
+      <p:sp>
+        <p:nvSpPr>
+          <p:cNvPr id="3" name="TextBox 2"/>
+          <p:cNvSpPr txBox="1"/>
+          <p:nvPr/>
+        </p:nvSpPr>
+        <p:spPr>
+          <a:xfrm>
+            <a:off x="0" y="5157193"/>
+            <a:ext cx="12192000" cy="584775"/>
+          </a:xfrm>
+          <a:prstGeom prst="rect">
+            <a:avLst/>
+          </a:prstGeom>
+          <a:noFill/>
+        </p:spPr>
+        <p:txBody>
+          <a:bodyPr wrap="square" rtlCol="0">
+            <a:spAutoFit/>
+          </a:bodyPr>
+          <a:lstStyle/>
+          <a:p>
+            <a:pPr algn="ctr"/>
+            <a:r>
+              <a:rPr lang="en-US" sz="3200" b="1" dirty="0">
+                <a:solidFill>
+                  <a:srgbClr val="660033"/>
+                </a:solidFill>
+                <a:latin typeface="Microsoft JhengHei" panose="020B0604030504040204" pitchFamily="34" charset="-120"/>
+                <a:ea typeface="Microsoft JhengHei" panose="020B0604030504040204" pitchFamily="34" charset="-120"/>
+              </a:rPr>
+              <a:t>( </a:t>
+            </a:r>
+            <a:r>
+              <a:rPr lang="zh-CN" altLang="en-US" sz="3200" b="1" dirty="0">
+                <a:solidFill>
+                  <a:srgbClr val="660033"/>
+                </a:solidFill>
+                <a:latin typeface="Microsoft JhengHei" panose="020B0604030504040204" pitchFamily="34" charset="-120"/>
+                <a:ea typeface="Microsoft JhengHei" panose="020B0604030504040204" pitchFamily="34" charset="-120"/>
+              </a:rPr>
+              <a:t>正歌</a:t>
+            </a:r>
+            <a:r>
+              <a:rPr lang="en-US" sz="3200" b="1" dirty="0">
+                <a:solidFill>
+                  <a:srgbClr val="660033"/>
+                </a:solidFill>
+                <a:latin typeface="Microsoft JhengHei" panose="020B0604030504040204" pitchFamily="34" charset="-120"/>
+                <a:ea typeface="Microsoft JhengHei" panose="020B0604030504040204" pitchFamily="34" charset="-120"/>
+              </a:rPr>
+              <a:t> )</a:t>
+            </a:r>
+            <a:endParaRPr lang="vi-VN" sz="3200" b="1" dirty="0">
+              <a:solidFill>
+                <a:srgbClr val="660033"/>
+              </a:solidFill>
+              <a:ea typeface="Microsoft JhengHei" panose="020B0604030504040204" pitchFamily="34" charset="-120"/>
+            </a:endParaRPr>
+          </a:p>
+        </p:txBody>
+      </p:sp>
+    </p:spTree>
+    <p:extLst>
+      <p:ext uri="{BB962C8B-B14F-4D97-AF65-F5344CB8AC3E}">
+        <p14:creationId xmlns:p14="http://schemas.microsoft.com/office/powerpoint/2010/main" val="2918539587"/>
+      </p:ext>
+    </p:extLst>
+  </p:cSld>
+  <p:clrMapOvr>
+    <a:masterClrMapping/>
+  </p:clrMapOvr>
+</p:sld>
+</file>
+
+<file path=ppt/slides/slide5.xml><?xml version="1.0" encoding="utf-8"?>
+<p:sld xmlns:a="http://schemas.openxmlformats.org/drawingml/2006/main" xmlns:r="http://schemas.openxmlformats.org/officeDocument/2006/relationships" xmlns:p="http://schemas.openxmlformats.org/presentationml/2006/main">
+  <p:cSld>
+    <p:spTree>
+      <p:nvGrpSpPr>
+        <p:cNvPr id="1" name=""/>
+        <p:cNvGrpSpPr/>
+        <p:nvPr/>
+      </p:nvGrpSpPr>
+      <p:grpSpPr>
+        <a:xfrm>
+          <a:off x="0" y="0"/>
+          <a:ext cx="0" cy="0"/>
+          <a:chOff x="0" y="0"/>
+          <a:chExt cx="0" cy="0"/>
+        </a:xfrm>
+      </p:grpSpPr>
+      <p:sp>
+        <p:nvSpPr>
+          <p:cNvPr id="5" name="內容版面配置區 4"/>
+          <p:cNvSpPr>
+            <a:spLocks noGrp="1"/>
+          </p:cNvSpPr>
+          <p:nvPr>
+            <p:ph idx="1"/>
+          </p:nvPr>
+        </p:nvSpPr>
+        <p:spPr>
+          <a:xfrm>
+            <a:off x="0" y="2084851"/>
+            <a:ext cx="12192000" cy="2404863"/>
+          </a:xfrm>
+        </p:spPr>
+        <p:txBody>
+          <a:bodyPr anchor="ctr">
+            <a:normAutofit/>
+          </a:bodyPr>
+          <a:lstStyle/>
           <a:p>
             <a:pPr algn="ctr">
               <a:buNone/>
             </a:pPr>
             <a:r>
-              <a:rPr lang="zh-TW" altLang="en-US" sz="5400" b="1" dirty="0" smtClean="0">
+              <a:rPr lang="zh-TW" altLang="en-US" sz="6400" b="1" dirty="0">
                 <a:solidFill>
                   <a:srgbClr val="660033"/>
                 </a:solidFill>
                 <a:latin typeface="微軟正黑體" pitchFamily="34" charset="-120"/>
                 <a:ea typeface="微軟正黑體" pitchFamily="34" charset="-120"/>
               </a:rPr>
-              <a:t>盡情</a:t>
-            </a:r>
-            <a:r>
-              <a:rPr lang="zh-TW" altLang="en-US" sz="5400" b="1" dirty="0">
+              <a:t>我以心靈誠實盡情敬拜</a:t>
+            </a:r>
+            <a:endParaRPr lang="en-US" altLang="zh-TW" sz="6400" b="1" dirty="0">
+              <a:solidFill>
+                <a:srgbClr val="660033"/>
+              </a:solidFill>
+              <a:latin typeface="微軟正黑體" pitchFamily="34" charset="-120"/>
+              <a:ea typeface="微軟正黑體" pitchFamily="34" charset="-120"/>
+            </a:endParaRPr>
+          </a:p>
+          <a:p>
+            <a:pPr algn="ctr">
+              <a:buNone/>
+            </a:pPr>
+            <a:r>
+              <a:rPr lang="zh-TW" altLang="en-US" sz="6400" b="1" dirty="0">
                 <a:solidFill>
                   <a:srgbClr val="660033"/>
                 </a:solidFill>
                 <a:latin typeface="微軟正黑體" pitchFamily="34" charset="-120"/>
                 <a:ea typeface="微軟正黑體" pitchFamily="34" charset="-120"/>
               </a:rPr>
-              <a:t>地敬拜你</a:t>
-            </a:r>
+              <a:t>坐在寶座上深愛我的主</a:t>
+            </a:r>
+          </a:p>
+        </p:txBody>
+      </p:sp>
+      <p:sp>
+        <p:nvSpPr>
+          <p:cNvPr id="3" name="TextBox 2"/>
+          <p:cNvSpPr txBox="1"/>
+          <p:nvPr/>
+        </p:nvSpPr>
+        <p:spPr>
+          <a:xfrm>
+            <a:off x="0" y="5157193"/>
+            <a:ext cx="12192000" cy="584775"/>
+          </a:xfrm>
+          <a:prstGeom prst="rect">
+            <a:avLst/>
+          </a:prstGeom>
+          <a:noFill/>
+        </p:spPr>
+        <p:txBody>
+          <a:bodyPr wrap="square" rtlCol="0">
+            <a:spAutoFit/>
+          </a:bodyPr>
+          <a:lstStyle/>
+          <a:p>
+            <a:pPr algn="ctr"/>
+            <a:r>
+              <a:rPr lang="en-US" sz="3200" b="1" dirty="0">
+                <a:solidFill>
+                  <a:srgbClr val="660033"/>
+                </a:solidFill>
+                <a:latin typeface="Microsoft JhengHei" panose="020B0604030504040204" pitchFamily="34" charset="-120"/>
+                <a:ea typeface="Microsoft JhengHei" panose="020B0604030504040204" pitchFamily="34" charset="-120"/>
+              </a:rPr>
+              <a:t>( </a:t>
+            </a:r>
+            <a:r>
+              <a:rPr lang="zh-CN" altLang="en-US" sz="3200" b="1" dirty="0">
+                <a:solidFill>
+                  <a:srgbClr val="660033"/>
+                </a:solidFill>
+                <a:latin typeface="Microsoft JhengHei" panose="020B0604030504040204" pitchFamily="34" charset="-120"/>
+                <a:ea typeface="Microsoft JhengHei" panose="020B0604030504040204" pitchFamily="34" charset="-120"/>
+              </a:rPr>
+              <a:t>正歌</a:t>
+            </a:r>
+            <a:r>
+              <a:rPr lang="en-US" sz="3200" b="1" dirty="0">
+                <a:solidFill>
+                  <a:srgbClr val="660033"/>
+                </a:solidFill>
+                <a:latin typeface="Microsoft JhengHei" panose="020B0604030504040204" pitchFamily="34" charset="-120"/>
+                <a:ea typeface="Microsoft JhengHei" panose="020B0604030504040204" pitchFamily="34" charset="-120"/>
+              </a:rPr>
+              <a:t> )</a:t>
+            </a:r>
+            <a:endParaRPr lang="vi-VN" sz="3200" b="1" dirty="0">
+              <a:solidFill>
+                <a:srgbClr val="660033"/>
+              </a:solidFill>
+              <a:ea typeface="Microsoft JhengHei" panose="020B0604030504040204" pitchFamily="34" charset="-120"/>
+            </a:endParaRPr>
           </a:p>
         </p:txBody>
       </p:sp>
     </p:spTree>
+    <p:extLst>
+      <p:ext uri="{BB962C8B-B14F-4D97-AF65-F5344CB8AC3E}">
+        <p14:creationId xmlns:p14="http://schemas.microsoft.com/office/powerpoint/2010/main" val="1358321170"/>
+      </p:ext>
+    </p:extLst>
+  </p:cSld>
+  <p:clrMapOvr>
+    <a:masterClrMapping/>
+  </p:clrMapOvr>
+</p:sld>
+</file>
+
+<file path=ppt/slides/slide6.xml><?xml version="1.0" encoding="utf-8"?>
+<p:sld xmlns:a="http://schemas.openxmlformats.org/drawingml/2006/main" xmlns:r="http://schemas.openxmlformats.org/officeDocument/2006/relationships" xmlns:p="http://schemas.openxmlformats.org/presentationml/2006/main">
+  <p:cSld>
+    <p:spTree>
+      <p:nvGrpSpPr>
+        <p:cNvPr id="1" name=""/>
+        <p:cNvGrpSpPr/>
+        <p:nvPr/>
+      </p:nvGrpSpPr>
+      <p:grpSpPr>
+        <a:xfrm>
+          <a:off x="0" y="0"/>
+          <a:ext cx="0" cy="0"/>
+          <a:chOff x="0" y="0"/>
+          <a:chExt cx="0" cy="0"/>
+        </a:xfrm>
+      </p:grpSpPr>
+      <p:sp>
+        <p:nvSpPr>
+          <p:cNvPr id="5" name="內容版面配置區 4"/>
+          <p:cNvSpPr>
+            <a:spLocks noGrp="1"/>
+          </p:cNvSpPr>
+          <p:nvPr>
+            <p:ph idx="1"/>
+          </p:nvPr>
+        </p:nvSpPr>
+        <p:spPr>
+          <a:xfrm>
+            <a:off x="0" y="2084851"/>
+            <a:ext cx="12192000" cy="2404863"/>
+          </a:xfrm>
+        </p:spPr>
+        <p:txBody>
+          <a:bodyPr anchor="ctr">
+            <a:normAutofit/>
+          </a:bodyPr>
+          <a:lstStyle/>
+          <a:p>
+            <a:pPr algn="ctr">
+              <a:buNone/>
+            </a:pPr>
+            <a:r>
+              <a:rPr lang="zh-TW" altLang="en-US" sz="6400" b="1" dirty="0">
+                <a:solidFill>
+                  <a:srgbClr val="660033"/>
+                </a:solidFill>
+                <a:latin typeface="微軟正黑體" pitchFamily="34" charset="-120"/>
+                <a:ea typeface="微軟正黑體" pitchFamily="34" charset="-120"/>
+              </a:rPr>
+              <a:t>舉起我的心來敬拜祢</a:t>
+            </a:r>
+            <a:endParaRPr lang="en-US" altLang="zh-TW" sz="6400" b="1" dirty="0">
+              <a:solidFill>
+                <a:srgbClr val="660033"/>
+              </a:solidFill>
+              <a:latin typeface="微軟正黑體" pitchFamily="34" charset="-120"/>
+              <a:ea typeface="微軟正黑體" pitchFamily="34" charset="-120"/>
+            </a:endParaRPr>
+          </a:p>
+          <a:p>
+            <a:pPr algn="ctr">
+              <a:buNone/>
+            </a:pPr>
+            <a:r>
+              <a:rPr lang="zh-TW" altLang="en-US" sz="6400" b="1" dirty="0">
+                <a:solidFill>
+                  <a:srgbClr val="660033"/>
+                </a:solidFill>
+                <a:latin typeface="微軟正黑體" pitchFamily="34" charset="-120"/>
+                <a:ea typeface="微軟正黑體" pitchFamily="34" charset="-120"/>
+              </a:rPr>
+              <a:t>用生命來回應祢的愛</a:t>
+            </a:r>
+            <a:endParaRPr lang="en-US" altLang="zh-TW" sz="6400" b="1" dirty="0">
+              <a:solidFill>
+                <a:srgbClr val="660033"/>
+              </a:solidFill>
+              <a:latin typeface="微軟正黑體" pitchFamily="34" charset="-120"/>
+              <a:ea typeface="微軟正黑體" pitchFamily="34" charset="-120"/>
+            </a:endParaRPr>
+          </a:p>
+        </p:txBody>
+      </p:sp>
+      <p:sp>
+        <p:nvSpPr>
+          <p:cNvPr id="3" name="TextBox 2"/>
+          <p:cNvSpPr txBox="1"/>
+          <p:nvPr/>
+        </p:nvSpPr>
+        <p:spPr>
+          <a:xfrm>
+            <a:off x="0" y="5157193"/>
+            <a:ext cx="12192000" cy="584775"/>
+          </a:xfrm>
+          <a:prstGeom prst="rect">
+            <a:avLst/>
+          </a:prstGeom>
+          <a:noFill/>
+        </p:spPr>
+        <p:txBody>
+          <a:bodyPr wrap="square" rtlCol="0">
+            <a:spAutoFit/>
+          </a:bodyPr>
+          <a:lstStyle/>
+          <a:p>
+            <a:pPr algn="ctr"/>
+            <a:r>
+              <a:rPr lang="en-US" sz="3200" b="1" dirty="0">
+                <a:solidFill>
+                  <a:srgbClr val="660033"/>
+                </a:solidFill>
+                <a:latin typeface="Microsoft JhengHei" panose="020B0604030504040204" pitchFamily="34" charset="-120"/>
+                <a:ea typeface="Microsoft JhengHei" panose="020B0604030504040204" pitchFamily="34" charset="-120"/>
+              </a:rPr>
+              <a:t>( </a:t>
+            </a:r>
+            <a:r>
+              <a:rPr lang="zh-CN" altLang="en-US" sz="3200" b="1" dirty="0">
+                <a:solidFill>
+                  <a:srgbClr val="660033"/>
+                </a:solidFill>
+                <a:latin typeface="Microsoft JhengHei" panose="020B0604030504040204" pitchFamily="34" charset="-120"/>
+                <a:ea typeface="Microsoft JhengHei" panose="020B0604030504040204" pitchFamily="34" charset="-120"/>
+              </a:rPr>
+              <a:t>副歌</a:t>
+            </a:r>
+            <a:r>
+              <a:rPr lang="en-US" sz="3200" b="1" dirty="0">
+                <a:solidFill>
+                  <a:srgbClr val="660033"/>
+                </a:solidFill>
+                <a:latin typeface="Microsoft JhengHei" panose="020B0604030504040204" pitchFamily="34" charset="-120"/>
+                <a:ea typeface="Microsoft JhengHei" panose="020B0604030504040204" pitchFamily="34" charset="-120"/>
+              </a:rPr>
+              <a:t> )</a:t>
+            </a:r>
+            <a:endParaRPr lang="vi-VN" sz="3200" b="1" dirty="0">
+              <a:solidFill>
+                <a:srgbClr val="660033"/>
+              </a:solidFill>
+              <a:ea typeface="Microsoft JhengHei" panose="020B0604030504040204" pitchFamily="34" charset="-120"/>
+            </a:endParaRPr>
+          </a:p>
+        </p:txBody>
+      </p:sp>
+    </p:spTree>
+    <p:extLst>
+      <p:ext uri="{BB962C8B-B14F-4D97-AF65-F5344CB8AC3E}">
+        <p14:creationId xmlns:p14="http://schemas.microsoft.com/office/powerpoint/2010/main" val="1670042918"/>
+      </p:ext>
+    </p:extLst>
+  </p:cSld>
+  <p:clrMapOvr>
+    <a:masterClrMapping/>
+  </p:clrMapOvr>
+</p:sld>
+</file>
+
+<file path=ppt/slides/slide7.xml><?xml version="1.0" encoding="utf-8"?>
+<p:sld xmlns:a="http://schemas.openxmlformats.org/drawingml/2006/main" xmlns:r="http://schemas.openxmlformats.org/officeDocument/2006/relationships" xmlns:p="http://schemas.openxmlformats.org/presentationml/2006/main">
+  <p:cSld>
+    <p:spTree>
+      <p:nvGrpSpPr>
+        <p:cNvPr id="1" name=""/>
+        <p:cNvGrpSpPr/>
+        <p:nvPr/>
+      </p:nvGrpSpPr>
+      <p:grpSpPr>
+        <a:xfrm>
+          <a:off x="0" y="0"/>
+          <a:ext cx="0" cy="0"/>
+          <a:chOff x="0" y="0"/>
+          <a:chExt cx="0" cy="0"/>
+        </a:xfrm>
+      </p:grpSpPr>
+      <p:sp>
+        <p:nvSpPr>
+          <p:cNvPr id="5" name="內容版面配置區 4"/>
+          <p:cNvSpPr>
+            <a:spLocks noGrp="1"/>
+          </p:cNvSpPr>
+          <p:nvPr>
+            <p:ph idx="1"/>
+          </p:nvPr>
+        </p:nvSpPr>
+        <p:spPr>
+          <a:xfrm>
+            <a:off x="0" y="2084851"/>
+            <a:ext cx="12192000" cy="2404863"/>
+          </a:xfrm>
+        </p:spPr>
+        <p:txBody>
+          <a:bodyPr anchor="ctr">
+            <a:normAutofit/>
+          </a:bodyPr>
+          <a:lstStyle/>
+          <a:p>
+            <a:pPr algn="ctr">
+              <a:buNone/>
+            </a:pPr>
+            <a:r>
+              <a:rPr lang="zh-TW" altLang="en-US" sz="6400" b="1" dirty="0">
+                <a:solidFill>
+                  <a:srgbClr val="660033"/>
+                </a:solidFill>
+                <a:latin typeface="微軟正黑體" pitchFamily="34" charset="-120"/>
+                <a:ea typeface="微軟正黑體" pitchFamily="34" charset="-120"/>
+              </a:rPr>
+              <a:t>哦  我的主讓我單單在乎祢</a:t>
+            </a:r>
+            <a:endParaRPr lang="en-US" altLang="zh-TW" sz="6400" b="1" dirty="0">
+              <a:solidFill>
+                <a:srgbClr val="660033"/>
+              </a:solidFill>
+              <a:latin typeface="微軟正黑體" pitchFamily="34" charset="-120"/>
+              <a:ea typeface="微軟正黑體" pitchFamily="34" charset="-120"/>
+            </a:endParaRPr>
+          </a:p>
+          <a:p>
+            <a:pPr algn="ctr">
+              <a:buNone/>
+            </a:pPr>
+            <a:r>
+              <a:rPr lang="zh-TW" altLang="en-US" sz="6400" b="1" dirty="0">
+                <a:solidFill>
+                  <a:srgbClr val="660033"/>
+                </a:solidFill>
+                <a:latin typeface="微軟正黑體" pitchFamily="34" charset="-120"/>
+                <a:ea typeface="微軟正黑體" pitchFamily="34" charset="-120"/>
+              </a:rPr>
+              <a:t>盡情地敬拜祢</a:t>
+            </a:r>
+          </a:p>
+        </p:txBody>
+      </p:sp>
+      <p:sp>
+        <p:nvSpPr>
+          <p:cNvPr id="3" name="TextBox 2"/>
+          <p:cNvSpPr txBox="1"/>
+          <p:nvPr/>
+        </p:nvSpPr>
+        <p:spPr>
+          <a:xfrm>
+            <a:off x="0" y="5157193"/>
+            <a:ext cx="12192000" cy="584775"/>
+          </a:xfrm>
+          <a:prstGeom prst="rect">
+            <a:avLst/>
+          </a:prstGeom>
+          <a:noFill/>
+        </p:spPr>
+        <p:txBody>
+          <a:bodyPr wrap="square" rtlCol="0">
+            <a:spAutoFit/>
+          </a:bodyPr>
+          <a:lstStyle/>
+          <a:p>
+            <a:pPr algn="ctr"/>
+            <a:r>
+              <a:rPr lang="en-US" sz="3200" b="1" dirty="0">
+                <a:solidFill>
+                  <a:srgbClr val="660033"/>
+                </a:solidFill>
+                <a:latin typeface="Microsoft JhengHei" panose="020B0604030504040204" pitchFamily="34" charset="-120"/>
+                <a:ea typeface="Microsoft JhengHei" panose="020B0604030504040204" pitchFamily="34" charset="-120"/>
+              </a:rPr>
+              <a:t>( </a:t>
+            </a:r>
+            <a:r>
+              <a:rPr lang="zh-CN" altLang="en-US" sz="3200" b="1" dirty="0">
+                <a:solidFill>
+                  <a:srgbClr val="660033"/>
+                </a:solidFill>
+                <a:latin typeface="Microsoft JhengHei" panose="020B0604030504040204" pitchFamily="34" charset="-120"/>
+                <a:ea typeface="Microsoft JhengHei" panose="020B0604030504040204" pitchFamily="34" charset="-120"/>
+              </a:rPr>
+              <a:t>副歌</a:t>
+            </a:r>
+            <a:r>
+              <a:rPr lang="en-US" sz="3200" b="1" dirty="0">
+                <a:solidFill>
+                  <a:srgbClr val="660033"/>
+                </a:solidFill>
+                <a:latin typeface="Microsoft JhengHei" panose="020B0604030504040204" pitchFamily="34" charset="-120"/>
+                <a:ea typeface="Microsoft JhengHei" panose="020B0604030504040204" pitchFamily="34" charset="-120"/>
+              </a:rPr>
+              <a:t> )</a:t>
+            </a:r>
+            <a:endParaRPr lang="vi-VN" sz="3200" b="1" dirty="0">
+              <a:solidFill>
+                <a:srgbClr val="660033"/>
+              </a:solidFill>
+              <a:ea typeface="Microsoft JhengHei" panose="020B0604030504040204" pitchFamily="34" charset="-120"/>
+            </a:endParaRPr>
+          </a:p>
+        </p:txBody>
+      </p:sp>
+    </p:spTree>
+    <p:extLst>
+      <p:ext uri="{BB962C8B-B14F-4D97-AF65-F5344CB8AC3E}">
+        <p14:creationId xmlns:p14="http://schemas.microsoft.com/office/powerpoint/2010/main" val="955720248"/>
+      </p:ext>
+    </p:extLst>
   </p:cSld>
   <p:clrMapOvr>
     <a:masterClrMapping/>
